--- a/rapports/septembre/Dorel_sept2026.pptx
+++ b/rapports/septembre/Dorel_sept2026.pptx
@@ -6016,7 +6016,7 @@
         <p:spPr>
           <a:xfrm>
             <a:off x="8296656" y="4389120"/>
-            <a:ext cx="2072640" cy="152400"/>
+            <a:ext cx="2225040" cy="152400"/>
           </a:xfrm>
           <a:prstGeom prst="rect">
             <a:avLst/>
@@ -6037,7 +6037,7 @@
                 </a:solidFill>
                 <a:latin typeface="Arial"/>
               </a:rPr>
-              <a:t>Poussettes</a:t>
+              <a:t>Sièges auto et rehausseurs</a:t>
             </a:r>
           </a:p>
         </p:txBody>
@@ -6095,7 +6095,7 @@
         <p:spPr>
           <a:xfrm>
             <a:off x="8296656" y="4657344"/>
-            <a:ext cx="2072640" cy="152400"/>
+            <a:ext cx="2225040" cy="152400"/>
           </a:xfrm>
           <a:prstGeom prst="rect">
             <a:avLst/>
@@ -6116,7 +6116,7 @@
                 </a:solidFill>
                 <a:latin typeface="Arial"/>
               </a:rPr>
-              <a:t>Couches · 33 %</a:t>
+              <a:t>Sommeil et voyage · 20 %</a:t>
             </a:r>
           </a:p>
         </p:txBody>
@@ -6174,7 +6174,7 @@
         <p:spPr>
           <a:xfrm>
             <a:off x="8296656" y="4925568"/>
-            <a:ext cx="2072640" cy="152400"/>
+            <a:ext cx="2225040" cy="152400"/>
           </a:xfrm>
           <a:prstGeom prst="rect">
             <a:avLst/>
@@ -6195,7 +6195,7 @@
                 </a:solidFill>
                 <a:latin typeface="Arial"/>
               </a:rPr>
-              <a:t>Biberons · 25 %</a:t>
+              <a:t>Poussettes et mobilité · 25 %</a:t>
             </a:r>
           </a:p>
         </p:txBody>
@@ -6253,7 +6253,7 @@
         <p:spPr>
           <a:xfrm>
             <a:off x="8296656" y="5193792"/>
-            <a:ext cx="2072640" cy="152400"/>
+            <a:ext cx="2225040" cy="152400"/>
           </a:xfrm>
           <a:prstGeom prst="rect">
             <a:avLst/>
@@ -6274,7 +6274,7 @@
                 </a:solidFill>
                 <a:latin typeface="Arial"/>
               </a:rPr>
-              <a:t>Autres puériculture · 5 %</a:t>
+              <a:t>Sécurité de la maison · 8 %</a:t>
             </a:r>
           </a:p>
         </p:txBody>
@@ -6287,8 +6287,166 @@
         </p:nvSpPr>
         <p:spPr>
           <a:xfrm>
+            <a:off x="8077200" y="5480304"/>
+            <a:ext cx="121920" cy="121920"/>
+          </a:xfrm>
+          <a:prstGeom prst="rect">
+            <a:avLst/>
+          </a:prstGeom>
+          <a:solidFill>
+            <a:srgbClr val="3E5A78"/>
+          </a:solidFill>
+          <a:ln>
+            <a:noFill/>
+          </a:ln>
+          <a:effectLst/>
+        </p:spPr>
+        <p:style>
+          <a:lnRef idx="1">
+            <a:schemeClr val="accent1"/>
+          </a:lnRef>
+          <a:fillRef idx="3">
+            <a:schemeClr val="accent1"/>
+          </a:fillRef>
+          <a:effectRef idx="2">
+            <a:schemeClr val="accent1"/>
+          </a:effectRef>
+          <a:fontRef idx="minor">
+            <a:schemeClr val="lt1"/>
+          </a:fontRef>
+        </p:style>
+        <p:txBody>
+          <a:bodyPr rtlCol="0" anchor="ctr"/>
+          <a:lstStyle/>
+          <a:p>
+            <a:pPr algn="ctr"/>
+          </a:p>
+        </p:txBody>
+      </p:sp>
+      <p:sp>
+        <p:nvSpPr>
+          <p:cNvPr id="83" name="TextBox 82"/>
+          <p:cNvSpPr txBox="1"/>
+          <p:nvPr/>
+        </p:nvSpPr>
+        <p:spPr>
+          <a:xfrm>
+            <a:off x="8296656" y="5462016"/>
+            <a:ext cx="2225040" cy="152400"/>
+          </a:xfrm>
+          <a:prstGeom prst="rect">
+            <a:avLst/>
+          </a:prstGeom>
+          <a:noFill/>
+        </p:spPr>
+        <p:txBody>
+          <a:bodyPr wrap="square" anchor="t" lIns="0" rIns="0" tIns="0" bIns="0">
+            <a:spAutoFit/>
+          </a:bodyPr>
+          <a:lstStyle/>
+          <a:p>
+            <a:pPr algn="l"/>
+            <a:r>
+              <a:rPr sz="1000" b="0" i="0">
+                <a:solidFill>
+                  <a:srgbClr val="111111"/>
+                </a:solidFill>
+                <a:latin typeface="Arial"/>
+              </a:rPr>
+              <a:t>Repas, soin et toilette · 10 %</a:t>
+            </a:r>
+          </a:p>
+        </p:txBody>
+      </p:sp>
+      <p:sp>
+        <p:nvSpPr>
+          <p:cNvPr id="84" name="Rectangle 83"/>
+          <p:cNvSpPr/>
+          <p:nvPr/>
+        </p:nvSpPr>
+        <p:spPr>
+          <a:xfrm>
+            <a:off x="8077200" y="5748528"/>
+            <a:ext cx="121920" cy="121920"/>
+          </a:xfrm>
+          <a:prstGeom prst="rect">
+            <a:avLst/>
+          </a:prstGeom>
+          <a:solidFill>
+            <a:srgbClr val="A09278"/>
+          </a:solidFill>
+          <a:ln>
+            <a:noFill/>
+          </a:ln>
+          <a:effectLst/>
+        </p:spPr>
+        <p:style>
+          <a:lnRef idx="1">
+            <a:schemeClr val="accent1"/>
+          </a:lnRef>
+          <a:fillRef idx="3">
+            <a:schemeClr val="accent1"/>
+          </a:fillRef>
+          <a:effectRef idx="2">
+            <a:schemeClr val="accent1"/>
+          </a:effectRef>
+          <a:fontRef idx="minor">
+            <a:schemeClr val="lt1"/>
+          </a:fontRef>
+        </p:style>
+        <p:txBody>
+          <a:bodyPr rtlCol="0" anchor="ctr"/>
+          <a:lstStyle/>
+          <a:p>
+            <a:pPr algn="ctr"/>
+          </a:p>
+        </p:txBody>
+      </p:sp>
+      <p:sp>
+        <p:nvSpPr>
+          <p:cNvPr id="85" name="TextBox 84"/>
+          <p:cNvSpPr txBox="1"/>
+          <p:nvPr/>
+        </p:nvSpPr>
+        <p:spPr>
+          <a:xfrm>
+            <a:off x="8296656" y="5730240"/>
+            <a:ext cx="2225040" cy="152400"/>
+          </a:xfrm>
+          <a:prstGeom prst="rect">
+            <a:avLst/>
+          </a:prstGeom>
+          <a:noFill/>
+        </p:spPr>
+        <p:txBody>
+          <a:bodyPr wrap="square" anchor="t" lIns="0" rIns="0" tIns="0" bIns="0">
+            <a:spAutoFit/>
+          </a:bodyPr>
+          <a:lstStyle/>
+          <a:p>
+            <a:pPr algn="l"/>
+            <a:r>
+              <a:rPr sz="1000" b="0" i="0">
+                <a:solidFill>
+                  <a:srgbClr val="111111"/>
+                </a:solidFill>
+                <a:latin typeface="Arial"/>
+              </a:rPr>
+              <a:t>Éveil et confort · 2 %</a:t>
+            </a:r>
+          </a:p>
+        </p:txBody>
+      </p:sp>
+      <p:sp>
+        <p:nvSpPr>
+          <p:cNvPr id="86" name="Rectangle 85"/>
+          <p:cNvSpPr/>
+          <p:nvPr/>
+        </p:nvSpPr>
+        <p:spPr>
+          <a:xfrm>
             <a:off x="10564368" y="4450080"/>
-            <a:ext cx="475488" cy="496214"/>
+            <a:ext cx="475488" cy="469392"/>
           </a:xfrm>
           <a:prstGeom prst="rect">
             <a:avLst/>
@@ -6325,14 +6483,14 @@
       </p:sp>
       <p:sp>
         <p:nvSpPr>
-          <p:cNvPr id="83" name="TextBox 82"/>
+          <p:cNvPr id="87" name="TextBox 86"/>
           <p:cNvSpPr txBox="1"/>
           <p:nvPr/>
         </p:nvSpPr>
         <p:spPr>
           <a:xfrm>
             <a:off x="10564368" y="4450080"/>
-            <a:ext cx="475488" cy="496214"/>
+            <a:ext cx="475488" cy="469392"/>
           </a:xfrm>
           <a:prstGeom prst="rect">
             <a:avLst/>
@@ -6353,21 +6511,21 @@
                 </a:solidFill>
                 <a:latin typeface="Arial"/>
               </a:rPr>
-              <a:t>37 %</a:t>
-            </a:r>
-          </a:p>
-        </p:txBody>
-      </p:sp>
-      <p:sp>
-        <p:nvSpPr>
-          <p:cNvPr id="84" name="Rectangle 83"/>
+              <a:t>35 %</a:t>
+            </a:r>
+          </a:p>
+        </p:txBody>
+      </p:sp>
+      <p:sp>
+        <p:nvSpPr>
+          <p:cNvPr id="88" name="Rectangle 87"/>
           <p:cNvSpPr/>
           <p:nvPr/>
         </p:nvSpPr>
         <p:spPr>
           <a:xfrm>
-            <a:off x="10564368" y="4946294"/>
-            <a:ext cx="475488" cy="442569"/>
+            <a:off x="10564368" y="4919472"/>
+            <a:ext cx="475488" cy="268224"/>
           </a:xfrm>
           <a:prstGeom prst="rect">
             <a:avLst/>
@@ -6404,48 +6562,13 @@
       </p:sp>
       <p:sp>
         <p:nvSpPr>
-          <p:cNvPr id="85" name="TextBox 84"/>
-          <p:cNvSpPr txBox="1"/>
-          <p:nvPr/>
-        </p:nvSpPr>
-        <p:spPr>
-          <a:xfrm>
-            <a:off x="10564368" y="4946294"/>
-            <a:ext cx="475488" cy="442569"/>
-          </a:xfrm>
-          <a:prstGeom prst="rect">
-            <a:avLst/>
-          </a:prstGeom>
-          <a:noFill/>
-        </p:spPr>
-        <p:txBody>
-          <a:bodyPr wrap="square" anchor="ctr" lIns="0" rIns="0" tIns="0" bIns="0">
-            <a:spAutoFit/>
-          </a:bodyPr>
-          <a:lstStyle/>
-          <a:p>
-            <a:pPr algn="ctr"/>
-            <a:r>
-              <a:rPr sz="1000" b="1" i="0">
-                <a:solidFill>
-                  <a:srgbClr val="FFFFFF"/>
-                </a:solidFill>
-                <a:latin typeface="Arial"/>
-              </a:rPr>
-              <a:t>33 %</a:t>
-            </a:r>
-          </a:p>
-        </p:txBody>
-      </p:sp>
-      <p:sp>
-        <p:nvSpPr>
-          <p:cNvPr id="86" name="Rectangle 85"/>
+          <p:cNvPr id="89" name="Rectangle 88"/>
           <p:cNvSpPr/>
           <p:nvPr/>
         </p:nvSpPr>
         <p:spPr>
           <a:xfrm>
-            <a:off x="10564368" y="5388864"/>
+            <a:off x="10564368" y="5187696"/>
             <a:ext cx="475488" cy="335280"/>
           </a:xfrm>
           <a:prstGeom prst="rect">
@@ -6483,13 +6606,13 @@
       </p:sp>
       <p:sp>
         <p:nvSpPr>
-          <p:cNvPr id="87" name="TextBox 86"/>
+          <p:cNvPr id="90" name="TextBox 89"/>
           <p:cNvSpPr txBox="1"/>
           <p:nvPr/>
         </p:nvSpPr>
         <p:spPr>
           <a:xfrm>
-            <a:off x="10564368" y="5388864"/>
+            <a:off x="10564368" y="5187696"/>
             <a:ext cx="475488" cy="335280"/>
           </a:xfrm>
           <a:prstGeom prst="rect">
@@ -6518,20 +6641,108 @@
       </p:sp>
       <p:sp>
         <p:nvSpPr>
-          <p:cNvPr id="88" name="Rectangle 87"/>
+          <p:cNvPr id="91" name="Rectangle 90"/>
           <p:cNvSpPr/>
           <p:nvPr/>
         </p:nvSpPr>
         <p:spPr>
           <a:xfrm>
-            <a:off x="10564368" y="5724144"/>
-            <a:ext cx="475488" cy="67056"/>
+            <a:off x="10564368" y="5522976"/>
+            <a:ext cx="475488" cy="107289"/>
           </a:xfrm>
           <a:prstGeom prst="rect">
             <a:avLst/>
           </a:prstGeom>
           <a:solidFill>
             <a:srgbClr val="EE6A2C"/>
+          </a:solidFill>
+          <a:ln>
+            <a:noFill/>
+          </a:ln>
+          <a:effectLst/>
+        </p:spPr>
+        <p:style>
+          <a:lnRef idx="1">
+            <a:schemeClr val="accent1"/>
+          </a:lnRef>
+          <a:fillRef idx="3">
+            <a:schemeClr val="accent1"/>
+          </a:fillRef>
+          <a:effectRef idx="2">
+            <a:schemeClr val="accent1"/>
+          </a:effectRef>
+          <a:fontRef idx="minor">
+            <a:schemeClr val="lt1"/>
+          </a:fontRef>
+        </p:style>
+        <p:txBody>
+          <a:bodyPr rtlCol="0" anchor="ctr"/>
+          <a:lstStyle/>
+          <a:p>
+            <a:pPr algn="ctr"/>
+          </a:p>
+        </p:txBody>
+      </p:sp>
+      <p:sp>
+        <p:nvSpPr>
+          <p:cNvPr id="92" name="Rectangle 91"/>
+          <p:cNvSpPr/>
+          <p:nvPr/>
+        </p:nvSpPr>
+        <p:spPr>
+          <a:xfrm>
+            <a:off x="10564368" y="5630265"/>
+            <a:ext cx="475488" cy="134112"/>
+          </a:xfrm>
+          <a:prstGeom prst="rect">
+            <a:avLst/>
+          </a:prstGeom>
+          <a:solidFill>
+            <a:srgbClr val="3E5A78"/>
+          </a:solidFill>
+          <a:ln>
+            <a:noFill/>
+          </a:ln>
+          <a:effectLst/>
+        </p:spPr>
+        <p:style>
+          <a:lnRef idx="1">
+            <a:schemeClr val="accent1"/>
+          </a:lnRef>
+          <a:fillRef idx="3">
+            <a:schemeClr val="accent1"/>
+          </a:fillRef>
+          <a:effectRef idx="2">
+            <a:schemeClr val="accent1"/>
+          </a:effectRef>
+          <a:fontRef idx="minor">
+            <a:schemeClr val="lt1"/>
+          </a:fontRef>
+        </p:style>
+        <p:txBody>
+          <a:bodyPr rtlCol="0" anchor="ctr"/>
+          <a:lstStyle/>
+          <a:p>
+            <a:pPr algn="ctr"/>
+          </a:p>
+        </p:txBody>
+      </p:sp>
+      <p:sp>
+        <p:nvSpPr>
+          <p:cNvPr id="93" name="Rectangle 92"/>
+          <p:cNvSpPr/>
+          <p:nvPr/>
+        </p:nvSpPr>
+        <p:spPr>
+          <a:xfrm>
+            <a:off x="10564368" y="5764377"/>
+            <a:ext cx="475488" cy="26822"/>
+          </a:xfrm>
+          <a:prstGeom prst="rect">
+            <a:avLst/>
+          </a:prstGeom>
+          <a:solidFill>
+            <a:srgbClr val="A09278"/>
           </a:solidFill>
           <a:ln>
             <a:noFill/>

--- a/rapports/septembre/Dorel_sept2026.pptx
+++ b/rapports/septembre/Dorel_sept2026.pptx
@@ -6037,7 +6037,7 @@
                 </a:solidFill>
                 <a:latin typeface="Arial"/>
               </a:rPr>
-              <a:t>Sièges auto et rehausseurs</a:t>
+              <a:t>Sièges auto et rehausseurs · 4 %</a:t>
             </a:r>
           </a:p>
         </p:txBody>
@@ -6116,7 +6116,7 @@
                 </a:solidFill>
                 <a:latin typeface="Arial"/>
               </a:rPr>
-              <a:t>Sommeil et voyage · 20 %</a:t>
+              <a:t>Sommeil et voyage · 11 %</a:t>
             </a:r>
           </a:p>
         </p:txBody>
@@ -6195,7 +6195,7 @@
                 </a:solidFill>
                 <a:latin typeface="Arial"/>
               </a:rPr>
-              <a:t>Poussettes et mobilité · 25 %</a:t>
+              <a:t>Poussettes et mobilité · 6 %</a:t>
             </a:r>
           </a:p>
         </p:txBody>
@@ -6274,7 +6274,7 @@
                 </a:solidFill>
                 <a:latin typeface="Arial"/>
               </a:rPr>
-              <a:t>Sécurité de la maison · 8 %</a:t>
+              <a:t>Sécurité de la maison · 62 %</a:t>
             </a:r>
           </a:p>
         </p:txBody>
@@ -6353,7 +6353,7 @@
                 </a:solidFill>
                 <a:latin typeface="Arial"/>
               </a:rPr>
-              <a:t>Repas, soin et toilette · 10 %</a:t>
+              <a:t>Repas, soin et toilette · 4 %</a:t>
             </a:r>
           </a:p>
         </p:txBody>
@@ -6432,7 +6432,7 @@
                 </a:solidFill>
                 <a:latin typeface="Arial"/>
               </a:rPr>
-              <a:t>Éveil et confort · 2 %</a:t>
+              <a:t>Éveil et confort · 13 %</a:t>
             </a:r>
           </a:p>
         </p:txBody>
@@ -6446,7 +6446,7 @@
         <p:spPr>
           <a:xfrm>
             <a:off x="10564368" y="4450080"/>
-            <a:ext cx="475488" cy="469392"/>
+            <a:ext cx="475488" cy="53644"/>
           </a:xfrm>
           <a:prstGeom prst="rect">
             <a:avLst/>
@@ -6483,49 +6483,14 @@
       </p:sp>
       <p:sp>
         <p:nvSpPr>
-          <p:cNvPr id="87" name="TextBox 86"/>
-          <p:cNvSpPr txBox="1"/>
-          <p:nvPr/>
-        </p:nvSpPr>
-        <p:spPr>
-          <a:xfrm>
-            <a:off x="10564368" y="4450080"/>
-            <a:ext cx="475488" cy="469392"/>
-          </a:xfrm>
-          <a:prstGeom prst="rect">
-            <a:avLst/>
-          </a:prstGeom>
-          <a:noFill/>
-        </p:spPr>
-        <p:txBody>
-          <a:bodyPr wrap="square" anchor="ctr" lIns="0" rIns="0" tIns="0" bIns="0">
-            <a:spAutoFit/>
-          </a:bodyPr>
-          <a:lstStyle/>
-          <a:p>
-            <a:pPr algn="ctr"/>
-            <a:r>
-              <a:rPr sz="1000" b="1" i="0">
-                <a:solidFill>
-                  <a:srgbClr val="FFFFFF"/>
-                </a:solidFill>
-                <a:latin typeface="Arial"/>
-              </a:rPr>
-              <a:t>35 %</a:t>
-            </a:r>
-          </a:p>
-        </p:txBody>
-      </p:sp>
-      <p:sp>
-        <p:nvSpPr>
-          <p:cNvPr id="88" name="Rectangle 87"/>
+          <p:cNvPr id="87" name="Rectangle 86"/>
           <p:cNvSpPr/>
           <p:nvPr/>
         </p:nvSpPr>
         <p:spPr>
           <a:xfrm>
-            <a:off x="10564368" y="4919472"/>
-            <a:ext cx="475488" cy="268224"/>
+            <a:off x="10564368" y="4503724"/>
+            <a:ext cx="475488" cy="147523"/>
           </a:xfrm>
           <a:prstGeom prst="rect">
             <a:avLst/>
@@ -6562,14 +6527,14 @@
       </p:sp>
       <p:sp>
         <p:nvSpPr>
-          <p:cNvPr id="89" name="Rectangle 88"/>
+          <p:cNvPr id="88" name="Rectangle 87"/>
           <p:cNvSpPr/>
           <p:nvPr/>
         </p:nvSpPr>
         <p:spPr>
           <a:xfrm>
-            <a:off x="10564368" y="5187696"/>
-            <a:ext cx="475488" cy="335280"/>
+            <a:off x="10564368" y="4651248"/>
+            <a:ext cx="475488" cy="80467"/>
           </a:xfrm>
           <a:prstGeom prst="rect">
             <a:avLst/>
@@ -6606,49 +6571,14 @@
       </p:sp>
       <p:sp>
         <p:nvSpPr>
-          <p:cNvPr id="90" name="TextBox 89"/>
-          <p:cNvSpPr txBox="1"/>
-          <p:nvPr/>
-        </p:nvSpPr>
-        <p:spPr>
-          <a:xfrm>
-            <a:off x="10564368" y="5187696"/>
-            <a:ext cx="475488" cy="335280"/>
-          </a:xfrm>
-          <a:prstGeom prst="rect">
-            <a:avLst/>
-          </a:prstGeom>
-          <a:noFill/>
-        </p:spPr>
-        <p:txBody>
-          <a:bodyPr wrap="square" anchor="ctr" lIns="0" rIns="0" tIns="0" bIns="0">
-            <a:spAutoFit/>
-          </a:bodyPr>
-          <a:lstStyle/>
-          <a:p>
-            <a:pPr algn="ctr"/>
-            <a:r>
-              <a:rPr sz="1000" b="1" i="0">
-                <a:solidFill>
-                  <a:srgbClr val="FFFFFF"/>
-                </a:solidFill>
-                <a:latin typeface="Arial"/>
-              </a:rPr>
-              <a:t>25 %</a:t>
-            </a:r>
-          </a:p>
-        </p:txBody>
-      </p:sp>
-      <p:sp>
-        <p:nvSpPr>
-          <p:cNvPr id="91" name="Rectangle 90"/>
+          <p:cNvPr id="89" name="Rectangle 88"/>
           <p:cNvSpPr/>
           <p:nvPr/>
         </p:nvSpPr>
         <p:spPr>
           <a:xfrm>
-            <a:off x="10564368" y="5522976"/>
-            <a:ext cx="475488" cy="107289"/>
+            <a:off x="10564368" y="4731715"/>
+            <a:ext cx="475488" cy="831494"/>
           </a:xfrm>
           <a:prstGeom prst="rect">
             <a:avLst/>
@@ -6685,14 +6615,49 @@
       </p:sp>
       <p:sp>
         <p:nvSpPr>
-          <p:cNvPr id="92" name="Rectangle 91"/>
+          <p:cNvPr id="90" name="TextBox 89"/>
+          <p:cNvSpPr txBox="1"/>
+          <p:nvPr/>
+        </p:nvSpPr>
+        <p:spPr>
+          <a:xfrm>
+            <a:off x="10564368" y="4731715"/>
+            <a:ext cx="475488" cy="831494"/>
+          </a:xfrm>
+          <a:prstGeom prst="rect">
+            <a:avLst/>
+          </a:prstGeom>
+          <a:noFill/>
+        </p:spPr>
+        <p:txBody>
+          <a:bodyPr wrap="square" anchor="ctr" lIns="0" rIns="0" tIns="0" bIns="0">
+            <a:spAutoFit/>
+          </a:bodyPr>
+          <a:lstStyle/>
+          <a:p>
+            <a:pPr algn="ctr"/>
+            <a:r>
+              <a:rPr sz="1000" b="1" i="0">
+                <a:solidFill>
+                  <a:srgbClr val="FFFFFF"/>
+                </a:solidFill>
+                <a:latin typeface="Arial"/>
+              </a:rPr>
+              <a:t>62 %</a:t>
+            </a:r>
+          </a:p>
+        </p:txBody>
+      </p:sp>
+      <p:sp>
+        <p:nvSpPr>
+          <p:cNvPr id="91" name="Rectangle 90"/>
           <p:cNvSpPr/>
           <p:nvPr/>
         </p:nvSpPr>
         <p:spPr>
           <a:xfrm>
-            <a:off x="10564368" y="5630265"/>
-            <a:ext cx="475488" cy="134112"/>
+            <a:off x="10564368" y="5563209"/>
+            <a:ext cx="475488" cy="53644"/>
           </a:xfrm>
           <a:prstGeom prst="rect">
             <a:avLst/>
@@ -6729,14 +6694,14 @@
       </p:sp>
       <p:sp>
         <p:nvSpPr>
-          <p:cNvPr id="93" name="Rectangle 92"/>
+          <p:cNvPr id="92" name="Rectangle 91"/>
           <p:cNvSpPr/>
           <p:nvPr/>
         </p:nvSpPr>
         <p:spPr>
           <a:xfrm>
-            <a:off x="10564368" y="5764377"/>
-            <a:ext cx="475488" cy="26822"/>
+            <a:off x="10564368" y="5616854"/>
+            <a:ext cx="475488" cy="174345"/>
           </a:xfrm>
           <a:prstGeom prst="rect">
             <a:avLst/>
@@ -7172,7 +7137,7 @@
                 </a:solidFill>
                 <a:latin typeface="Arial"/>
               </a:rPr>
-              <a:t>Parler aux futurs parents au moment de la naissance</a:t>
+              <a:t>Les jeux d'éveil cliquent le plus</a:t>
             </a:r>
           </a:p>
         </p:txBody>
@@ -7207,7 +7172,7 @@
                 </a:solidFill>
                 <a:latin typeface="Arial"/>
               </a:rPr>
-              <a:t>La naissance déclenche 75,3 % des conversations, loin devant le cadeau (11,4 %) et le départ en vacances (8,9 %).</a:t>
+              <a:t>Le tapis d'éveil Gymini Tiny Love atteint 9,2 fois le CTR moyen, et le groupe jeux d'éveil 4,05 fois. Ils ne représentent pourtant que 3 % de la diffusion.</a:t>
             </a:r>
           </a:p>
         </p:txBody>
@@ -7242,7 +7207,7 @@
                 </a:solidFill>
                 <a:latin typeface="Arial"/>
               </a:rPr>
-              <a:t>→  Construire les accroches autour de l'arrivée de bébé : « Tout pour accueillir votre nouveau-né ».</a:t>
+              <a:t>→  Augmenter fortement la part des jeux et tapis d'éveil dans la diffusion.</a:t>
             </a:r>
           </a:p>
         </p:txBody>
@@ -7358,7 +7323,7 @@
                 </a:solidFill>
                 <a:latin typeface="Arial"/>
               </a:rPr>
-              <a:t>Mettre la poussette au premier plan</a:t>
+              <a:t>Afficher le prix dans l'annonce</a:t>
             </a:r>
           </a:p>
         </p:txBody>
@@ -7393,7 +7358,7 @@
                 </a:solidFill>
                 <a:latin typeface="Arial"/>
               </a:rPr>
-              <a:t>Les poussettes sont le premier produit nommé (36,4 %), devant les couches (33,2 %) et les biberons (25,3 %).</a:t>
+              <a:t>Les annonces avec un prix précis (tapis à 69,63 €, trotteur à 44,99 €) font partie des meilleures.</a:t>
             </a:r>
           </a:p>
         </p:txBody>
@@ -7428,7 +7393,7 @@
                 </a:solidFill>
                 <a:latin typeface="Arial"/>
               </a:rPr>
-              <a:t>→  Prioriser les poussettes dans le carrousel et associer chaque modèle à un usage (voyage, ville, compacité).</a:t>
+              <a:t>→  Indiquer le prix et la livraison offerte dans les accroches.</a:t>
             </a:r>
           </a:p>
         </p:txBody>
@@ -7544,7 +7509,7 @@
                 </a:solidFill>
                 <a:latin typeface="Arial"/>
               </a:rPr>
-              <a:t>Une marque très recommandée par les IA</a:t>
+              <a:t>Revoir le mobilier et le sommeil</a:t>
             </a:r>
           </a:p>
         </p:txBody>
@@ -7579,7 +7544,7 @@
                 </a:solidFill>
                 <a:latin typeface="Arial"/>
               </a:rPr>
-              <a:t>Dorel est 2e en part de voix (17,7 %, derrière Cybex) et 1re des recommandations spontanées des IA (74,4 %, +55,2 pts). Sa part de voix ads recule à 17,0 % (−7,4 pts).</a:t>
+              <a:t>La chaise haute Lily (0,36 fois), le siège auto EvoluFix (0,46 fois) et le lit parapluie (0,50 fois) restent nettement sous la moyenne.</a:t>
             </a:r>
           </a:p>
         </p:txBody>
@@ -7614,7 +7579,7 @@
                 </a:solidFill>
                 <a:latin typeface="Arial"/>
               </a:rPr>
-              <a:t>→  Maintenir la pression ads pour transformer cette recommandation en clics vers Cdiscount.</a:t>
+              <a:t>→  Associer ces produits à un moment concret (premier repas, départ en vacances).</a:t>
             </a:r>
           </a:p>
         </p:txBody>
@@ -7800,7 +7765,7 @@
                 </a:solidFill>
                 <a:latin typeface="Arial"/>
               </a:rPr>
-              <a:t>→  Garder le ciblage actuel et tester des accroches « voyage avec bébé » sur les poussettes compactes.</a:t>
+              <a:t>→  Concentrer le budget sur l'éveil et la sécurité de la maison.</a:t>
             </a:r>
           </a:p>
         </p:txBody>
